--- a/Rapport_stage_acad/Soutenance_stage_HOUNKPETOHOU.pptx
+++ b/Rapport_stage_acad/Soutenance_stage_HOUNKPETOHOU.pptx
@@ -18458,7 +18458,7 @@
                 </a:solidFill>
                 <a:latin typeface="Calibri"/>
               </a:rPr>
-              <a:t>Type de bien, standing, superficie, distribution, commodités, zone, budget, mode de financement.</a:t>
+              <a:t>Type de bien, standing, superficie, distribution, commodités, zone, budget, mode de financement — ajustés au bien cherché.</a:t>
             </a:r>
           </a:p>
         </p:txBody>
